--- a/data-eng/decks/w4d3s3.pptx
+++ b/data-eng/decks/w4d3s3.pptx
@@ -3100,7 +3100,7 @@
       <p:grpSpPr/>
       <p:sp>
         <p:nvSpPr>
-          <p:cNvPr id="2" name="Oval 1"/>
+          <p:cNvPr id="2" name="deckgen:decor"/>
           <p:cNvSpPr/>
           <p:nvPr/>
         </p:nvSpPr>
@@ -3130,7 +3130,7 @@
       </p:sp>
       <p:sp>
         <p:nvSpPr>
-          <p:cNvPr id="3" name="Oval 2"/>
+          <p:cNvPr id="3" name="deckgen:decor"/>
           <p:cNvSpPr/>
           <p:nvPr/>
         </p:nvSpPr>
@@ -3160,7 +3160,7 @@
       </p:sp>
       <p:sp>
         <p:nvSpPr>
-          <p:cNvPr id="4" name="Oval 3"/>
+          <p:cNvPr id="4" name="deckgen:decor"/>
           <p:cNvSpPr/>
           <p:nvPr/>
         </p:nvSpPr>
@@ -3190,7 +3190,7 @@
       </p:sp>
       <p:sp>
         <p:nvSpPr>
-          <p:cNvPr id="5" name="Rectangle 4"/>
+          <p:cNvPr id="5" name="deckgen:decor"/>
           <p:cNvSpPr/>
           <p:nvPr/>
         </p:nvSpPr>
@@ -3220,7 +3220,7 @@
       </p:sp>
       <p:sp>
         <p:nvSpPr>
-          <p:cNvPr id="6" name="Oval 5"/>
+          <p:cNvPr id="6" name="deckgen:decor"/>
           <p:cNvSpPr/>
           <p:nvPr/>
         </p:nvSpPr>
@@ -3250,7 +3250,7 @@
       </p:sp>
       <p:sp>
         <p:nvSpPr>
-          <p:cNvPr id="7" name="Oval 6"/>
+          <p:cNvPr id="7" name="deckgen:decor"/>
           <p:cNvSpPr/>
           <p:nvPr/>
         </p:nvSpPr>
@@ -3280,7 +3280,7 @@
       </p:sp>
       <p:sp>
         <p:nvSpPr>
-          <p:cNvPr id="8" name="Oval 7"/>
+          <p:cNvPr id="8" name="deckgen:decor"/>
           <p:cNvSpPr/>
           <p:nvPr/>
         </p:nvSpPr>
@@ -3310,7 +3310,7 @@
       </p:sp>
       <p:sp>
         <p:nvSpPr>
-          <p:cNvPr id="9" name="Oval 8"/>
+          <p:cNvPr id="9" name="deckgen:decor"/>
           <p:cNvSpPr/>
           <p:nvPr/>
         </p:nvSpPr>
@@ -3340,7 +3340,7 @@
       </p:sp>
       <p:sp>
         <p:nvSpPr>
-          <p:cNvPr id="10" name="Rectangle 9"/>
+          <p:cNvPr id="10" name="deckgen:decor"/>
           <p:cNvSpPr/>
           <p:nvPr/>
         </p:nvSpPr>
@@ -3600,7 +3600,7 @@
       <p:grpSpPr/>
       <p:sp>
         <p:nvSpPr>
-          <p:cNvPr id="2" name="Oval 1"/>
+          <p:cNvPr id="2" name="deckgen:decor"/>
           <p:cNvSpPr/>
           <p:nvPr/>
         </p:nvSpPr>
@@ -3630,7 +3630,7 @@
       </p:sp>
       <p:sp>
         <p:nvSpPr>
-          <p:cNvPr id="3" name="Oval 2"/>
+          <p:cNvPr id="3" name="deckgen:decor"/>
           <p:cNvSpPr/>
           <p:nvPr/>
         </p:nvSpPr>
@@ -3660,7 +3660,7 @@
       </p:sp>
       <p:sp>
         <p:nvSpPr>
-          <p:cNvPr id="4" name="Oval 3"/>
+          <p:cNvPr id="4" name="deckgen:decor"/>
           <p:cNvSpPr/>
           <p:nvPr/>
         </p:nvSpPr>
@@ -3941,7 +3941,7 @@
                 <a:ea typeface="Pretendard"/>
                 <a:cs typeface="Pretendard"/>
               </a:rPr>
-              <a:t>etl_bad.py 에서 multiple source rows matched 오류를 봤다</a:t>
+              <a:t>etl_bad.py 에서 MERGE_CARDINALITY_VIOLATION 을 봤다</a:t>
             </a:r>
           </a:p>
         </p:txBody>
@@ -4233,7 +4233,7 @@
                 <a:ea typeface="Pretendard"/>
                 <a:cs typeface="Pretendard"/>
               </a:rPr>
-              <a:t>order_id 2 의 amount 가 35000 으로 갱신됐다</a:t>
+              <a:t>2 는 35000, 1 의 channel 은 web 으로 채워졌다</a:t>
             </a:r>
           </a:p>
         </p:txBody>
@@ -4379,7 +4379,7 @@
                 <a:ea typeface="Pretendard"/>
                 <a:cs typeface="Pretendard"/>
               </a:rPr>
-              <a:t>한 번 더 돌려도 total rows 4, snapshots 는 한 건 늘었다</a:t>
+              <a:t>재실행해도 total rows 4, snapshots 끝에 overwrite 두 줄</a:t>
             </a:r>
           </a:p>
         </p:txBody>
@@ -4525,7 +4525,7 @@
                 <a:ea typeface="Pretendard"/>
                 <a:cs typeface="Pretendard"/>
               </a:rPr>
-              <a:t>08-03 · bad 파일 뒤 orders 가 6행(order_id 1~5, 7)이다</a:t>
+              <a:t>08-03 · bad 뒤 orders 6행(1~5, 7), 랜딩 존 파일 셋</a:t>
             </a:r>
           </a:p>
         </p:txBody>
@@ -4662,7 +4662,7 @@
       <p:grpSpPr/>
       <p:sp>
         <p:nvSpPr>
-          <p:cNvPr id="2" name="Oval 1"/>
+          <p:cNvPr id="2" name="deckgen:decor"/>
           <p:cNvSpPr/>
           <p:nvPr/>
         </p:nvSpPr>
@@ -4692,7 +4692,7 @@
       </p:sp>
       <p:sp>
         <p:nvSpPr>
-          <p:cNvPr id="3" name="Oval 2"/>
+          <p:cNvPr id="3" name="deckgen:decor"/>
           <p:cNvSpPr/>
           <p:nvPr/>
         </p:nvSpPr>
@@ -5100,7 +5100,7 @@
                 <a:ea typeface="Pretendard"/>
                 <a:cs typeface="Pretendard"/>
               </a:rPr>
-              <a:t>체크리스트 · 자주 겪는 오류 4가지</a:t>
+              <a:t>체크리스트 · 자주 겪는 오류</a:t>
             </a:r>
           </a:p>
         </p:txBody>
@@ -5444,7 +5444,7 @@
                 <a:ea typeface="Pretendard"/>
                 <a:cs typeface="Pretendard"/>
               </a:rPr>
-              <a:t>orders 6행(order_id 1~5, 7) · 불량 파일 삭제</a:t>
+              <a:t>orders 6행(1~5, 7) · 불량 파일 삭제</a:t>
             </a:r>
           </a:p>
         </p:txBody>
@@ -5469,7 +5469,7 @@
       <p:grpSpPr/>
       <p:sp>
         <p:nvSpPr>
-          <p:cNvPr id="2" name="Oval 1"/>
+          <p:cNvPr id="2" name="deckgen:decor"/>
           <p:cNvSpPr/>
           <p:nvPr/>
         </p:nvSpPr>
@@ -5499,7 +5499,7 @@
       </p:sp>
       <p:sp>
         <p:nvSpPr>
-          <p:cNvPr id="3" name="Oval 2"/>
+          <p:cNvPr id="3" name="deckgen:decor"/>
           <p:cNvSpPr/>
           <p:nvPr/>
         </p:nvSpPr>
@@ -5529,7 +5529,7 @@
       </p:sp>
       <p:sp>
         <p:nvSpPr>
-          <p:cNvPr id="4" name="Oval 3"/>
+          <p:cNvPr id="4" name="deckgen:decor"/>
           <p:cNvSpPr/>
           <p:nvPr/>
         </p:nvSpPr>
@@ -5810,7 +5810,7 @@
                 <a:ea typeface="Pretendard"/>
                 <a:cs typeface="Pretendard"/>
               </a:rPr>
-              <a:t>중복을 안 줄이고 MERGE 해 카디널리티 오류를 직접 본다</a:t>
+              <a:t>중복을 안 줄이고 MERGE 해 MERGE_CARDINALITY 오류를 직접 본다</a:t>
             </a:r>
           </a:p>
         </p:txBody>
@@ -5956,7 +5956,7 @@
                 <a:ea typeface="Pretendard"/>
                 <a:cs typeface="Pretendard"/>
               </a:rPr>
-              <a:t>Window + row_number 로 키별 최신 한 행만 남기는 ETL 을 쓴다</a:t>
+              <a:t>히어독으로 etl_orders.py 를 만들고 키별 최신 한 행만 남긴다</a:t>
             </a:r>
           </a:p>
         </p:txBody>
@@ -6323,7 +6323,7 @@
                 <a:ea typeface="Pretendard"/>
                 <a:cs typeface="Pretendard"/>
               </a:rPr>
-              <a:t>스크립트는 /home/iceberg/scripts/ 에, spark-submit 의 --conf 네 개는 앞 챕터와 같습니다</a:t>
+              <a:t>spark-submit 은 exec -T · --packages 하나와 --conf 네 개 — 앞 챕터와 같습니다</a:t>
             </a:r>
           </a:p>
         </p:txBody>
@@ -6460,7 +6460,7 @@
       <p:grpSpPr/>
       <p:sp>
         <p:nvSpPr>
-          <p:cNvPr id="2" name="Oval 1"/>
+          <p:cNvPr id="2" name="deckgen:decor"/>
           <p:cNvSpPr/>
           <p:nvPr/>
         </p:nvSpPr>
@@ -6490,7 +6490,7 @@
       </p:sp>
       <p:sp>
         <p:nvSpPr>
-          <p:cNvPr id="3" name="Oval 2"/>
+          <p:cNvPr id="3" name="deckgen:decor"/>
           <p:cNvSpPr/>
           <p:nvPr/>
         </p:nvSpPr>
@@ -6520,7 +6520,7 @@
       </p:sp>
       <p:sp>
         <p:nvSpPr>
-          <p:cNvPr id="4" name="Oval 3"/>
+          <p:cNvPr id="4" name="deckgen:decor"/>
           <p:cNvSpPr/>
           <p:nvPr/>
         </p:nvSpPr>
@@ -6696,7 +6696,7 @@
                 <a:ea typeface="Pretendard"/>
                 <a:cs typeface="Pretendard"/>
               </a:rPr>
-              <a:t>스크립트 하나(etl_orders.py)를 완성한 뒤에는 파일만 바꿔 가며 같은 명령을 반복합니다</a:t>
+              <a:t>스크립트는 cat &gt; … &lt;&lt; 'EOF' 로 만들고, 그 뒤엔 파일만 바꿔 같은 명령을 반복합니다</a:t>
             </a:r>
           </a:p>
         </p:txBody>
@@ -6860,7 +6860,7 @@
                 <a:ea typeface="Pretendard"/>
                 <a:cs typeface="Pretendard"/>
               </a:rPr>
-              <a:t>중복 안 줄임</a:t>
+              <a:t>grep -m1</a:t>
             </a:r>
           </a:p>
         </p:txBody>
@@ -7188,7 +7188,7 @@
                 <a:ea typeface="Pretendard"/>
                 <a:cs typeface="Pretendard"/>
               </a:rPr>
-              <a:t>amount 35000</a:t>
+              <a:t>실측 29초</a:t>
             </a:r>
           </a:p>
         </p:txBody>
@@ -7334,7 +7334,7 @@
                 <a:ea typeface="Pretendard"/>
                 <a:cs typeface="Pretendard"/>
               </a:rPr>
-              <a:t>한 번 더</a:t>
+              <a:t>total rows 4</a:t>
             </a:r>
           </a:p>
           <a:p>
@@ -7352,7 +7352,7 @@
                 <a:ea typeface="Pretendard"/>
                 <a:cs typeface="Pretendard"/>
               </a:rPr>
-              <a:t>snapshots</a:t>
+              <a:t>overwrite 두 줄</a:t>
             </a:r>
           </a:p>
         </p:txBody>
@@ -7653,7 +7653,7 @@
       <p:grpSpPr/>
       <p:sp>
         <p:nvSpPr>
-          <p:cNvPr id="2" name="Oval 1"/>
+          <p:cNvPr id="2" name="deckgen:decor"/>
           <p:cNvSpPr/>
           <p:nvPr/>
         </p:nvSpPr>
@@ -7683,7 +7683,7 @@
       </p:sp>
       <p:sp>
         <p:nvSpPr>
-          <p:cNvPr id="3" name="Oval 2"/>
+          <p:cNvPr id="3" name="deckgen:decor"/>
           <p:cNvSpPr/>
           <p:nvPr/>
         </p:nvSpPr>
@@ -7713,7 +7713,7 @@
       </p:sp>
       <p:sp>
         <p:nvSpPr>
-          <p:cNvPr id="4" name="Oval 3"/>
+          <p:cNvPr id="4" name="deckgen:decor"/>
           <p:cNvSpPr/>
           <p:nvPr/>
         </p:nvSpPr>
@@ -7994,7 +7994,7 @@
                 <a:ea typeface="Pretendard"/>
                 <a:cs typeface="Pretendard"/>
               </a:rPr>
-              <a:t>etl_bad.py — 읽기 · 형 변환 · 바로 MERGE</a:t>
+              <a:t>cat &gt; scripts/etl_bad.py &lt;&lt; 'EOF'</a:t>
             </a:r>
           </a:p>
         </p:txBody>
@@ -8035,7 +8035,7 @@
                 <a:ea typeface="Pretendard"/>
                 <a:cs typeface="Pretendard"/>
               </a:rPr>
-              <a:t>row_number 없이 updates 뷰를 만들어 MERGE INTO demo.lakehouse.orders</a:t>
+              <a:t>row_number 없이 읽기 · 형 변환 뒤 바로 MERGE — 상자째 붙여 넣으면 파일이 생긴다</a:t>
             </a:r>
           </a:p>
         </p:txBody>
@@ -8181,7 +8181,7 @@
                 <a:ea typeface="Pretendard"/>
                 <a:cs typeface="Pretendard"/>
               </a:rPr>
-              <a:t>spark-submit --conf ×4 … etl_bad.py 2&gt;&amp;1 | tail -n 20</a:t>
+              <a:t>spark-submit … etl_bad.py | grep -m1 'MERGE_CARD…'</a:t>
             </a:r>
           </a:p>
         </p:txBody>
@@ -8222,7 +8222,7 @@
                 <a:ea typeface="Pretendard"/>
                 <a:cs typeface="Pretendard"/>
               </a:rPr>
-              <a:t>마지막 20줄에서 오류 문구를 찾는다</a:t>
+              <a:t>exec -T · --packages · --conf ×4 — 뒤로 종료 로그 수백 줄이라 한 줄만 꺼낸다</a:t>
             </a:r>
           </a:p>
         </p:txBody>
@@ -8368,7 +8368,7 @@
                 <a:ea typeface="Pretendard"/>
                 <a:cs typeface="Pretendard"/>
               </a:rPr>
-              <a:t>multiple source rows matched a single target row</a:t>
+              <a:t>[MERGE_CARDINALITY_VIOLATION]</a:t>
             </a:r>
           </a:p>
         </p:txBody>
@@ -8409,7 +8409,7 @@
                 <a:ea typeface="Pretendard"/>
                 <a:cs typeface="Pretendard"/>
               </a:rPr>
-              <a:t>order_id 2 가 두 행이라 어느 값으로 갱신할지 정할 수 없다는 뜻 — 나야 정상</a:t>
+              <a:t>대상 한 행(order_id 2)에 원천 두 행이 맞물림 — 나야 정상, 테이블은 4행 그대로</a:t>
             </a:r>
           </a:p>
         </p:txBody>
@@ -8680,7 +8680,7 @@
       <p:grpSpPr/>
       <p:sp>
         <p:nvSpPr>
-          <p:cNvPr id="2" name="Oval 1"/>
+          <p:cNvPr id="2" name="deckgen:decor"/>
           <p:cNvSpPr/>
           <p:nvPr/>
         </p:nvSpPr>
@@ -8710,7 +8710,7 @@
       </p:sp>
       <p:sp>
         <p:nvSpPr>
-          <p:cNvPr id="3" name="Oval 2"/>
+          <p:cNvPr id="3" name="deckgen:decor"/>
           <p:cNvSpPr/>
           <p:nvPr/>
         </p:nvSpPr>
@@ -8740,7 +8740,7 @@
       </p:sp>
       <p:sp>
         <p:nvSpPr>
-          <p:cNvPr id="4" name="Oval 3"/>
+          <p:cNvPr id="4" name="deckgen:decor"/>
           <p:cNvSpPr/>
           <p:nvPr/>
         </p:nvSpPr>
@@ -9696,7 +9696,7 @@
                 <a:ea typeface="Pretendard"/>
                 <a:cs typeface="Pretendard"/>
               </a:rPr>
-              <a:t>print 세 줄(원천 행 · 정제 후 행 · total rows)을 grep 으로 골라 본다</a:t>
+              <a:t>cat &gt; scripts/etl_orders.py &lt;&lt; 'EOF' 로 만들고, print 세 줄을 grep 으로 골라 본다</a:t>
             </a:r>
           </a:p>
         </p:txBody>
@@ -9874,7 +9874,7 @@
       <p:grpSpPr/>
       <p:sp>
         <p:nvSpPr>
-          <p:cNvPr id="2" name="Oval 1"/>
+          <p:cNvPr id="2" name="deckgen:decor"/>
           <p:cNvSpPr/>
           <p:nvPr/>
         </p:nvSpPr>
@@ -9904,7 +9904,7 @@
       </p:sp>
       <p:sp>
         <p:nvSpPr>
-          <p:cNvPr id="3" name="Oval 2"/>
+          <p:cNvPr id="3" name="deckgen:decor"/>
           <p:cNvSpPr/>
           <p:nvPr/>
         </p:nvSpPr>
@@ -9934,7 +9934,7 @@
       </p:sp>
       <p:sp>
         <p:nvSpPr>
-          <p:cNvPr id="4" name="Oval 3"/>
+          <p:cNvPr id="4" name="deckgen:decor"/>
           <p:cNvSpPr/>
           <p:nvPr/>
         </p:nvSpPr>
@@ -10967,7 +10967,7 @@
       <p:grpSpPr/>
       <p:sp>
         <p:nvSpPr>
-          <p:cNvPr id="2" name="Oval 1"/>
+          <p:cNvPr id="2" name="deckgen:decor"/>
           <p:cNvSpPr/>
           <p:nvPr/>
         </p:nvSpPr>
@@ -10997,7 +10997,7 @@
       </p:sp>
       <p:sp>
         <p:nvSpPr>
-          <p:cNvPr id="3" name="Oval 2"/>
+          <p:cNvPr id="3" name="deckgen:decor"/>
           <p:cNvSpPr/>
           <p:nvPr/>
         </p:nvSpPr>
@@ -11027,7 +11027,7 @@
       </p:sp>
       <p:sp>
         <p:nvSpPr>
-          <p:cNvPr id="4" name="Oval 3"/>
+          <p:cNvPr id="4" name="deckgen:decor"/>
           <p:cNvSpPr/>
           <p:nvPr/>
         </p:nvSpPr>
@@ -11349,7 +11349,7 @@
                 <a:ea typeface="Pretendard"/>
                 <a:cs typeface="Pretendard"/>
               </a:rPr>
-              <a:t>--conf 네 개는 앞 챕터와 같다 → 원천 행 5 · 정제 후 행 4 · total rows 4</a:t>
+              <a:t>exec -T · --packages · --conf ×4 → 원천 행 5 · 정제 후 행 4 · total rows 4(29초)</a:t>
             </a:r>
           </a:p>
         </p:txBody>
@@ -11736,12 +11736,199 @@
         </p:nvSpPr>
         <p:spPr>
           <a:xfrm>
-            <a:off x="13144500" y="2933700"/>
-            <a:ext cx="4000500" cy="3629025"/>
+            <a:off x="1143000" y="6734175"/>
+            <a:ext cx="11430000" cy="1095375"/>
           </a:xfrm>
           <a:prstGeom prst="roundRect">
             <a:avLst>
-              <a:gd name="adj" fmla="val 1312"/>
+              <a:gd name="adj" fmla="val 4347"/>
+            </a:avLst>
+          </a:prstGeom>
+          <a:solidFill>
+            <a:srgbClr val="FAFBFD"/>
+          </a:solidFill>
+          <a:ln w="9525">
+            <a:solidFill>
+              <a:srgbClr val="DCE1E8"/>
+            </a:solidFill>
+          </a:ln>
+          <a:effectLst/>
+        </p:spPr>
+        <p:txBody>
+          <a:bodyPr rtlCol="0" anchor="ctr" wrap="square"/>
+          <a:lstStyle/>
+          <a:p>
+            <a:pPr algn="ctr"/>
+          </a:p>
+        </p:txBody>
+      </p:sp>
+      <p:sp>
+        <p:nvSpPr>
+          <p:cNvPr id="24" name="Oval 23"/>
+          <p:cNvSpPr/>
+          <p:nvPr/>
+        </p:nvSpPr>
+        <p:spPr>
+          <a:xfrm>
+            <a:off x="1447800" y="6981825"/>
+            <a:ext cx="590550" cy="590550"/>
+          </a:xfrm>
+          <a:prstGeom prst="ellipse">
+            <a:avLst/>
+          </a:prstGeom>
+          <a:solidFill>
+            <a:srgbClr val="0D2B5E"/>
+          </a:solidFill>
+          <a:ln>
+            <a:noFill/>
+          </a:ln>
+          <a:effectLst/>
+        </p:spPr>
+        <p:txBody>
+          <a:bodyPr rtlCol="0" anchor="ctr" wrap="square"/>
+          <a:lstStyle/>
+          <a:p>
+            <a:pPr algn="ctr"/>
+          </a:p>
+        </p:txBody>
+      </p:sp>
+      <p:sp>
+        <p:nvSpPr>
+          <p:cNvPr id="25" name="TextBox 24"/>
+          <p:cNvSpPr txBox="1"/>
+          <p:nvPr/>
+        </p:nvSpPr>
+        <p:spPr>
+          <a:xfrm>
+            <a:off x="1447800" y="7134225"/>
+            <a:ext cx="590550" cy="323850"/>
+          </a:xfrm>
+          <a:prstGeom prst="rect">
+            <a:avLst/>
+          </a:prstGeom>
+          <a:noFill/>
+        </p:spPr>
+        <p:txBody>
+          <a:bodyPr wrap="square" lIns="0" rIns="0" tIns="0" bIns="0" anchor="t">
+            <a:spAutoFit/>
+          </a:bodyPr>
+          <a:lstStyle/>
+          <a:p>
+            <a:pPr algn="ctr">
+              <a:lnSpc>
+                <a:spcPct val="100000"/>
+              </a:lnSpc>
+            </a:pPr>
+            <a:r>
+              <a:rPr sz="2250" b="1">
+                <a:solidFill>
+                  <a:srgbClr val="FFFFFF"/>
+                </a:solidFill>
+                <a:latin typeface="Pretendard"/>
+                <a:ea typeface="Pretendard"/>
+                <a:cs typeface="Pretendard"/>
+              </a:rPr>
+              <a:t>4</a:t>
+            </a:r>
+          </a:p>
+        </p:txBody>
+      </p:sp>
+      <p:sp>
+        <p:nvSpPr>
+          <p:cNvPr id="26" name="TextBox 25"/>
+          <p:cNvSpPr txBox="1"/>
+          <p:nvPr/>
+        </p:nvSpPr>
+        <p:spPr>
+          <a:xfrm>
+            <a:off x="2324100" y="6943725"/>
+            <a:ext cx="9906000" cy="400050"/>
+          </a:xfrm>
+          <a:prstGeom prst="rect">
+            <a:avLst/>
+          </a:prstGeom>
+          <a:noFill/>
+        </p:spPr>
+        <p:txBody>
+          <a:bodyPr wrap="square" lIns="0" rIns="0" tIns="0" bIns="0" anchor="t">
+            <a:spAutoFit/>
+          </a:bodyPr>
+          <a:lstStyle/>
+          <a:p>
+            <a:pPr algn="l">
+              <a:lnSpc>
+                <a:spcPct val="110000"/>
+              </a:lnSpc>
+            </a:pPr>
+            <a:r>
+              <a:rPr sz="2475" b="1">
+                <a:solidFill>
+                  <a:srgbClr val="0D2B5E"/>
+                </a:solidFill>
+                <a:latin typeface="Pretendard"/>
+                <a:ea typeface="Pretendard"/>
+                <a:cs typeface="Pretendard"/>
+              </a:rPr>
+              <a:t>UPDATE SET * 는 행 전체를 덮는다</a:t>
+            </a:r>
+          </a:p>
+        </p:txBody>
+      </p:sp>
+      <p:sp>
+        <p:nvSpPr>
+          <p:cNvPr id="27" name="TextBox 26"/>
+          <p:cNvSpPr txBox="1"/>
+          <p:nvPr/>
+        </p:nvSpPr>
+        <p:spPr>
+          <a:xfrm>
+            <a:off x="2324100" y="7343775"/>
+            <a:ext cx="9906000" cy="361950"/>
+          </a:xfrm>
+          <a:prstGeom prst="rect">
+            <a:avLst/>
+          </a:prstGeom>
+          <a:noFill/>
+        </p:spPr>
+        <p:txBody>
+          <a:bodyPr wrap="square" lIns="0" rIns="0" tIns="0" bIns="0" anchor="t">
+            <a:spAutoFit/>
+          </a:bodyPr>
+          <a:lstStyle/>
+          <a:p>
+            <a:pPr algn="l">
+              <a:lnSpc>
+                <a:spcPct val="120000"/>
+              </a:lnSpc>
+            </a:pPr>
+            <a:r>
+              <a:rPr sz="2025" b="0">
+                <a:solidFill>
+                  <a:srgbClr val="3D3D3D"/>
+                </a:solidFill>
+                <a:latin typeface="Pretendard"/>
+                <a:ea typeface="Pretendard"/>
+                <a:cs typeface="Pretendard"/>
+              </a:rPr>
+              <a:t>1 의 channel 이 NULL → web, 3·4 는 고객까지 8-02 파일 값으로</a:t>
+            </a:r>
+          </a:p>
+        </p:txBody>
+      </p:sp>
+      <p:sp>
+        <p:nvSpPr>
+          <p:cNvPr id="28" name="Rounded Rectangle 27"/>
+          <p:cNvSpPr/>
+          <p:nvPr/>
+        </p:nvSpPr>
+        <p:spPr>
+          <a:xfrm>
+            <a:off x="13144500" y="2933700"/>
+            <a:ext cx="4000500" cy="4895850"/>
+          </a:xfrm>
+          <a:prstGeom prst="roundRect">
+            <a:avLst>
+              <a:gd name="adj" fmla="val 1190"/>
             </a:avLst>
           </a:prstGeom>
           <a:solidFill>
@@ -11764,13 +11951,13 @@
       </p:sp>
       <p:sp>
         <p:nvSpPr>
-          <p:cNvPr id="24" name="TextBox 23"/>
-          <p:cNvSpPr txBox="1"/>
-          <p:nvPr/>
-        </p:nvSpPr>
-        <p:spPr>
-          <a:xfrm>
-            <a:off x="13487400" y="3929062"/>
+          <p:cNvPr id="29" name="TextBox 28"/>
+          <p:cNvSpPr txBox="1"/>
+          <p:nvPr/>
+        </p:nvSpPr>
+        <p:spPr>
+          <a:xfrm>
+            <a:off x="13487400" y="4562475"/>
             <a:ext cx="3314700" cy="304800"/>
           </a:xfrm>
           <a:prstGeom prst="rect">
@@ -11805,13 +11992,13 @@
       </p:sp>
       <p:sp>
         <p:nvSpPr>
-          <p:cNvPr id="25" name="TextBox 24"/>
-          <p:cNvSpPr txBox="1"/>
-          <p:nvPr/>
-        </p:nvSpPr>
-        <p:spPr>
-          <a:xfrm>
-            <a:off x="13487400" y="4329112"/>
+          <p:cNvPr id="30" name="TextBox 29"/>
+          <p:cNvSpPr txBox="1"/>
+          <p:nvPr/>
+        </p:nvSpPr>
+        <p:spPr>
+          <a:xfrm>
+            <a:off x="13487400" y="4962525"/>
             <a:ext cx="3314700" cy="1238250"/>
           </a:xfrm>
           <a:prstGeom prst="rect">
@@ -11846,7 +12033,7 @@
       </p:sp>
       <p:sp>
         <p:nvSpPr>
-          <p:cNvPr id="26" name="Rectangle 25"/>
+          <p:cNvPr id="31" name="Rectangle 30"/>
           <p:cNvSpPr/>
           <p:nvPr/>
         </p:nvSpPr>
@@ -11876,7 +12063,7 @@
       </p:sp>
       <p:sp>
         <p:nvSpPr>
-          <p:cNvPr id="27" name="TextBox 26"/>
+          <p:cNvPr id="32" name="TextBox 31"/>
           <p:cNvSpPr txBox="1"/>
           <p:nvPr/>
         </p:nvSpPr>
@@ -11917,7 +12104,7 @@
       </p:sp>
       <p:sp>
         <p:nvSpPr>
-          <p:cNvPr id="28" name="TextBox 27"/>
+          <p:cNvPr id="33" name="TextBox 32"/>
           <p:cNvSpPr txBox="1"/>
           <p:nvPr/>
         </p:nvSpPr>
@@ -11976,7 +12163,7 @@
       <p:grpSpPr/>
       <p:sp>
         <p:nvSpPr>
-          <p:cNvPr id="2" name="Oval 1"/>
+          <p:cNvPr id="2" name="deckgen:decor"/>
           <p:cNvSpPr/>
           <p:nvPr/>
         </p:nvSpPr>
@@ -12006,7 +12193,7 @@
       </p:sp>
       <p:sp>
         <p:nvSpPr>
-          <p:cNvPr id="3" name="Oval 2"/>
+          <p:cNvPr id="3" name="deckgen:decor"/>
           <p:cNvSpPr/>
           <p:nvPr/>
         </p:nvSpPr>
@@ -12036,7 +12223,7 @@
       </p:sp>
       <p:sp>
         <p:nvSpPr>
-          <p:cNvPr id="4" name="Oval 3"/>
+          <p:cNvPr id="4" name="deckgen:decor"/>
           <p:cNvSpPr/>
           <p:nvPr/>
         </p:nvSpPr>
@@ -12582,7 +12769,7 @@
                 <a:ea typeface="Pretendard"/>
                 <a:cs typeface="Pretendard"/>
               </a:rPr>
-              <a:t>MERGE 실행마다 커밋 이력이 한 건씩</a:t>
+              <a:t>셸에서 spark-sql -e 로 이력 조회</a:t>
             </a:r>
           </a:p>
         </p:txBody>
@@ -12687,7 +12874,7 @@
                 <a:ea typeface="Pretendard"/>
                 <a:cs typeface="Pretendard"/>
               </a:rPr>
-              <a:t>SELECT committed_at, snapshot_id, operation</a:t>
+              <a:t>끝에 overwrite 두 줄 — 첫 실행 · 재실행</a:t>
             </a:r>
           </a:p>
         </p:txBody>
@@ -12758,7 +12945,7 @@
                 <a:ea typeface="Pretendard"/>
                 <a:cs typeface="Pretendard"/>
               </a:rPr>
-              <a:t>FROM demo.lakehouse.orders.snapshots</a:t>
+              <a:t>MERGE 는 파일을 통째로 다시 써 overwrite</a:t>
             </a:r>
           </a:p>
         </p:txBody>
@@ -12829,7 +13016,7 @@
                 <a:ea typeface="Pretendard"/>
                 <a:cs typeface="Pretendard"/>
               </a:rPr>
-              <a:t>count 는 그대로, 실행 기록은 쌓인다</a:t>
+              <a:t>실패한 etl_bad 는 줄을 남기지 않는다</a:t>
             </a:r>
           </a:p>
         </p:txBody>
@@ -13037,7 +13224,7 @@
       <p:grpSpPr/>
       <p:sp>
         <p:nvSpPr>
-          <p:cNvPr id="2" name="Oval 1"/>
+          <p:cNvPr id="2" name="deckgen:decor"/>
           <p:cNvSpPr/>
           <p:nvPr/>
         </p:nvSpPr>
@@ -13067,7 +13254,7 @@
       </p:sp>
       <p:sp>
         <p:nvSpPr>
-          <p:cNvPr id="3" name="Oval 2"/>
+          <p:cNvPr id="3" name="deckgen:decor"/>
           <p:cNvSpPr/>
           <p:nvPr/>
         </p:nvSpPr>
@@ -13097,7 +13284,7 @@
       </p:sp>
       <p:sp>
         <p:nvSpPr>
-          <p:cNvPr id="4" name="Oval 3"/>
+          <p:cNvPr id="4" name="deckgen:decor"/>
           <p:cNvSpPr/>
           <p:nvPr/>
         </p:nvSpPr>
@@ -13662,7 +13849,7 @@
                 <a:ea typeface="Pretendard"/>
                 <a:cs typeface="Pretendard"/>
               </a:rPr>
-              <a:t>orders_2026-08-02</a:t>
+              <a:t>첫 실행(08-01·02)</a:t>
             </a:r>
           </a:p>
         </p:txBody>
@@ -14037,7 +14224,7 @@
                 <a:ea typeface="Pretendard"/>
                 <a:cs typeface="Pretendard"/>
               </a:rPr>
-              <a:t>orders_2026-08-03</a:t>
+              <a:t>같은 명령 재실행</a:t>
             </a:r>
           </a:p>
         </p:txBody>
@@ -14112,7 +14299,7 @@
                 <a:ea typeface="Pretendard"/>
                 <a:cs typeface="Pretendard"/>
               </a:rPr>
-              <a:t>7</a:t>
+              <a:t>5</a:t>
             </a:r>
           </a:p>
         </p:txBody>
@@ -14187,7 +14374,7 @@
                 <a:ea typeface="Pretendard"/>
                 <a:cs typeface="Pretendard"/>
               </a:rPr>
-              <a:t>5</a:t>
+              <a:t>4</a:t>
             </a:r>
           </a:p>
         </p:txBody>
@@ -14262,7 +14449,7 @@
                 <a:ea typeface="Pretendard"/>
                 <a:cs typeface="Pretendard"/>
               </a:rPr>
-              <a:t>5</a:t>
+              <a:t>4</a:t>
             </a:r>
           </a:p>
         </p:txBody>
@@ -14337,7 +14524,7 @@
                 <a:ea typeface="Pretendard"/>
                 <a:cs typeface="Pretendard"/>
               </a:rPr>
-              <a:t>4 갱신 61000 · 5 신규</a:t>
+              <a:t>변화 없음 · overwrite 한 줄</a:t>
             </a:r>
           </a:p>
         </p:txBody>
@@ -14412,7 +14599,7 @@
                 <a:ea typeface="Pretendard"/>
                 <a:cs typeface="Pretendard"/>
               </a:rPr>
-              <a:t>orders_bad</a:t>
+              <a:t>orders_2026-08-03</a:t>
             </a:r>
           </a:p>
         </p:txBody>
@@ -14487,7 +14674,7 @@
                 <a:ea typeface="Pretendard"/>
                 <a:cs typeface="Pretendard"/>
               </a:rPr>
-              <a:t>10</a:t>
+              <a:t>7</a:t>
             </a:r>
           </a:p>
         </p:txBody>
@@ -14562,7 +14749,7 @@
                 <a:ea typeface="Pretendard"/>
                 <a:cs typeface="Pretendard"/>
               </a:rPr>
-              <a:t>6</a:t>
+              <a:t>5</a:t>
             </a:r>
           </a:p>
         </p:txBody>
@@ -14637,7 +14824,7 @@
                 <a:ea typeface="Pretendard"/>
                 <a:cs typeface="Pretendard"/>
               </a:rPr>
-              <a:t>6</a:t>
+              <a:t>5</a:t>
             </a:r>
           </a:p>
         </p:txBody>
@@ -14712,6 +14899,381 @@
                 <a:ea typeface="Pretendard"/>
                 <a:cs typeface="Pretendard"/>
               </a:rPr>
+              <a:t>4 갱신 61000 · 5 신규</a:t>
+            </a:r>
+          </a:p>
+        </p:txBody>
+      </p:sp>
+      <p:sp>
+        <p:nvSpPr>
+          <p:cNvPr id="48" name="Rounded Rectangle 47"/>
+          <p:cNvSpPr/>
+          <p:nvPr/>
+        </p:nvSpPr>
+        <p:spPr>
+          <a:xfrm>
+            <a:off x="1143000" y="5619750"/>
+            <a:ext cx="3802380" cy="647700"/>
+          </a:xfrm>
+          <a:prstGeom prst="roundRect">
+            <a:avLst>
+              <a:gd name="adj" fmla="val 5882"/>
+            </a:avLst>
+          </a:prstGeom>
+          <a:solidFill>
+            <a:srgbClr val="EDF3FD"/>
+          </a:solidFill>
+          <a:ln w="9525">
+            <a:solidFill>
+              <a:srgbClr val="BFD3F5"/>
+            </a:solidFill>
+          </a:ln>
+          <a:effectLst/>
+        </p:spPr>
+        <p:txBody>
+          <a:bodyPr rtlCol="0" anchor="ctr" wrap="square"/>
+          <a:lstStyle/>
+          <a:p>
+            <a:pPr algn="ctr"/>
+          </a:p>
+        </p:txBody>
+      </p:sp>
+      <p:sp>
+        <p:nvSpPr>
+          <p:cNvPr id="49" name="TextBox 48"/>
+          <p:cNvSpPr txBox="1"/>
+          <p:nvPr/>
+        </p:nvSpPr>
+        <p:spPr>
+          <a:xfrm>
+            <a:off x="1238250" y="5619750"/>
+            <a:ext cx="3611880" cy="647700"/>
+          </a:xfrm>
+          <a:prstGeom prst="rect">
+            <a:avLst/>
+          </a:prstGeom>
+          <a:noFill/>
+        </p:spPr>
+        <p:txBody>
+          <a:bodyPr wrap="square" lIns="0" rIns="0" tIns="0" bIns="0" anchor="ctr">
+            <a:spAutoFit/>
+          </a:bodyPr>
+          <a:lstStyle/>
+          <a:p>
+            <a:pPr algn="l">
+              <a:lnSpc>
+                <a:spcPct val="115000"/>
+              </a:lnSpc>
+            </a:pPr>
+            <a:r>
+              <a:rPr sz="1875" b="1">
+                <a:solidFill>
+                  <a:srgbClr val="0D2B5E"/>
+                </a:solidFill>
+                <a:latin typeface="Pretendard"/>
+                <a:ea typeface="Pretendard"/>
+                <a:cs typeface="Pretendard"/>
+              </a:rPr>
+              <a:t>orders_bad</a:t>
+            </a:r>
+          </a:p>
+        </p:txBody>
+      </p:sp>
+      <p:sp>
+        <p:nvSpPr>
+          <p:cNvPr id="50" name="Rounded Rectangle 49"/>
+          <p:cNvSpPr/>
+          <p:nvPr/>
+        </p:nvSpPr>
+        <p:spPr>
+          <a:xfrm>
+            <a:off x="4983480" y="5619750"/>
+            <a:ext cx="2042160" cy="647700"/>
+          </a:xfrm>
+          <a:prstGeom prst="roundRect">
+            <a:avLst>
+              <a:gd name="adj" fmla="val 5882"/>
+            </a:avLst>
+          </a:prstGeom>
+          <a:solidFill>
+            <a:srgbClr val="FAFBFD"/>
+          </a:solidFill>
+          <a:ln w="9525">
+            <a:solidFill>
+              <a:srgbClr val="DCE1E8"/>
+            </a:solidFill>
+          </a:ln>
+          <a:effectLst/>
+        </p:spPr>
+        <p:txBody>
+          <a:bodyPr rtlCol="0" anchor="ctr" wrap="square"/>
+          <a:lstStyle/>
+          <a:p>
+            <a:pPr algn="ctr"/>
+          </a:p>
+        </p:txBody>
+      </p:sp>
+      <p:sp>
+        <p:nvSpPr>
+          <p:cNvPr id="51" name="TextBox 50"/>
+          <p:cNvSpPr txBox="1"/>
+          <p:nvPr/>
+        </p:nvSpPr>
+        <p:spPr>
+          <a:xfrm>
+            <a:off x="5078730" y="5619750"/>
+            <a:ext cx="1851660" cy="647700"/>
+          </a:xfrm>
+          <a:prstGeom prst="rect">
+            <a:avLst/>
+          </a:prstGeom>
+          <a:noFill/>
+        </p:spPr>
+        <p:txBody>
+          <a:bodyPr wrap="square" lIns="0" rIns="0" tIns="0" bIns="0" anchor="ctr">
+            <a:spAutoFit/>
+          </a:bodyPr>
+          <a:lstStyle/>
+          <a:p>
+            <a:pPr algn="ctr">
+              <a:lnSpc>
+                <a:spcPct val="115000"/>
+              </a:lnSpc>
+            </a:pPr>
+            <a:r>
+              <a:rPr sz="1875" b="0">
+                <a:solidFill>
+                  <a:srgbClr val="3D3D3D"/>
+                </a:solidFill>
+                <a:latin typeface="Pretendard"/>
+                <a:ea typeface="Pretendard"/>
+                <a:cs typeface="Pretendard"/>
+              </a:rPr>
+              <a:t>10</a:t>
+            </a:r>
+          </a:p>
+        </p:txBody>
+      </p:sp>
+      <p:sp>
+        <p:nvSpPr>
+          <p:cNvPr id="52" name="Rounded Rectangle 51"/>
+          <p:cNvSpPr/>
+          <p:nvPr/>
+        </p:nvSpPr>
+        <p:spPr>
+          <a:xfrm>
+            <a:off x="7063740" y="5619750"/>
+            <a:ext cx="2042160" cy="647700"/>
+          </a:xfrm>
+          <a:prstGeom prst="roundRect">
+            <a:avLst>
+              <a:gd name="adj" fmla="val 5882"/>
+            </a:avLst>
+          </a:prstGeom>
+          <a:solidFill>
+            <a:srgbClr val="FAFBFD"/>
+          </a:solidFill>
+          <a:ln w="9525">
+            <a:solidFill>
+              <a:srgbClr val="DCE1E8"/>
+            </a:solidFill>
+          </a:ln>
+          <a:effectLst/>
+        </p:spPr>
+        <p:txBody>
+          <a:bodyPr rtlCol="0" anchor="ctr" wrap="square"/>
+          <a:lstStyle/>
+          <a:p>
+            <a:pPr algn="ctr"/>
+          </a:p>
+        </p:txBody>
+      </p:sp>
+      <p:sp>
+        <p:nvSpPr>
+          <p:cNvPr id="53" name="TextBox 52"/>
+          <p:cNvSpPr txBox="1"/>
+          <p:nvPr/>
+        </p:nvSpPr>
+        <p:spPr>
+          <a:xfrm>
+            <a:off x="7158990" y="5619750"/>
+            <a:ext cx="1851660" cy="647700"/>
+          </a:xfrm>
+          <a:prstGeom prst="rect">
+            <a:avLst/>
+          </a:prstGeom>
+          <a:noFill/>
+        </p:spPr>
+        <p:txBody>
+          <a:bodyPr wrap="square" lIns="0" rIns="0" tIns="0" bIns="0" anchor="ctr">
+            <a:spAutoFit/>
+          </a:bodyPr>
+          <a:lstStyle/>
+          <a:p>
+            <a:pPr algn="ctr">
+              <a:lnSpc>
+                <a:spcPct val="115000"/>
+              </a:lnSpc>
+            </a:pPr>
+            <a:r>
+              <a:rPr sz="1875" b="0">
+                <a:solidFill>
+                  <a:srgbClr val="3D3D3D"/>
+                </a:solidFill>
+                <a:latin typeface="Pretendard"/>
+                <a:ea typeface="Pretendard"/>
+                <a:cs typeface="Pretendard"/>
+              </a:rPr>
+              <a:t>6</a:t>
+            </a:r>
+          </a:p>
+        </p:txBody>
+      </p:sp>
+      <p:sp>
+        <p:nvSpPr>
+          <p:cNvPr id="54" name="Rounded Rectangle 53"/>
+          <p:cNvSpPr/>
+          <p:nvPr/>
+        </p:nvSpPr>
+        <p:spPr>
+          <a:xfrm>
+            <a:off x="9144000" y="5619750"/>
+            <a:ext cx="2522220" cy="647700"/>
+          </a:xfrm>
+          <a:prstGeom prst="roundRect">
+            <a:avLst>
+              <a:gd name="adj" fmla="val 5882"/>
+            </a:avLst>
+          </a:prstGeom>
+          <a:solidFill>
+            <a:srgbClr val="FAFBFD"/>
+          </a:solidFill>
+          <a:ln w="9525">
+            <a:solidFill>
+              <a:srgbClr val="DCE1E8"/>
+            </a:solidFill>
+          </a:ln>
+          <a:effectLst/>
+        </p:spPr>
+        <p:txBody>
+          <a:bodyPr rtlCol="0" anchor="ctr" wrap="square"/>
+          <a:lstStyle/>
+          <a:p>
+            <a:pPr algn="ctr"/>
+          </a:p>
+        </p:txBody>
+      </p:sp>
+      <p:sp>
+        <p:nvSpPr>
+          <p:cNvPr id="55" name="TextBox 54"/>
+          <p:cNvSpPr txBox="1"/>
+          <p:nvPr/>
+        </p:nvSpPr>
+        <p:spPr>
+          <a:xfrm>
+            <a:off x="9239250" y="5619750"/>
+            <a:ext cx="2331720" cy="647700"/>
+          </a:xfrm>
+          <a:prstGeom prst="rect">
+            <a:avLst/>
+          </a:prstGeom>
+          <a:noFill/>
+        </p:spPr>
+        <p:txBody>
+          <a:bodyPr wrap="square" lIns="0" rIns="0" tIns="0" bIns="0" anchor="ctr">
+            <a:spAutoFit/>
+          </a:bodyPr>
+          <a:lstStyle/>
+          <a:p>
+            <a:pPr algn="ctr">
+              <a:lnSpc>
+                <a:spcPct val="115000"/>
+              </a:lnSpc>
+            </a:pPr>
+            <a:r>
+              <a:rPr sz="1875" b="0">
+                <a:solidFill>
+                  <a:srgbClr val="3D3D3D"/>
+                </a:solidFill>
+                <a:latin typeface="Pretendard"/>
+                <a:ea typeface="Pretendard"/>
+                <a:cs typeface="Pretendard"/>
+              </a:rPr>
+              <a:t>6</a:t>
+            </a:r>
+          </a:p>
+        </p:txBody>
+      </p:sp>
+      <p:sp>
+        <p:nvSpPr>
+          <p:cNvPr id="56" name="Rounded Rectangle 55"/>
+          <p:cNvSpPr/>
+          <p:nvPr/>
+        </p:nvSpPr>
+        <p:spPr>
+          <a:xfrm>
+            <a:off x="11704320" y="5619750"/>
+            <a:ext cx="5440680" cy="647700"/>
+          </a:xfrm>
+          <a:prstGeom prst="roundRect">
+            <a:avLst>
+              <a:gd name="adj" fmla="val 5882"/>
+            </a:avLst>
+          </a:prstGeom>
+          <a:solidFill>
+            <a:srgbClr val="FAFBFD"/>
+          </a:solidFill>
+          <a:ln w="9525">
+            <a:solidFill>
+              <a:srgbClr val="DCE1E8"/>
+            </a:solidFill>
+          </a:ln>
+          <a:effectLst/>
+        </p:spPr>
+        <p:txBody>
+          <a:bodyPr rtlCol="0" anchor="ctr" wrap="square"/>
+          <a:lstStyle/>
+          <a:p>
+            <a:pPr algn="ctr"/>
+          </a:p>
+        </p:txBody>
+      </p:sp>
+      <p:sp>
+        <p:nvSpPr>
+          <p:cNvPr id="57" name="TextBox 56"/>
+          <p:cNvSpPr txBox="1"/>
+          <p:nvPr/>
+        </p:nvSpPr>
+        <p:spPr>
+          <a:xfrm>
+            <a:off x="11799570" y="5619750"/>
+            <a:ext cx="5250180" cy="647700"/>
+          </a:xfrm>
+          <a:prstGeom prst="rect">
+            <a:avLst/>
+          </a:prstGeom>
+          <a:noFill/>
+        </p:spPr>
+        <p:txBody>
+          <a:bodyPr wrap="square" lIns="0" rIns="0" tIns="0" bIns="0" anchor="ctr">
+            <a:spAutoFit/>
+          </a:bodyPr>
+          <a:lstStyle/>
+          <a:p>
+            <a:pPr algn="ctr">
+              <a:lnSpc>
+                <a:spcPct val="115000"/>
+              </a:lnSpc>
+            </a:pPr>
+            <a:r>
+              <a:rPr sz="1875" b="0">
+                <a:solidFill>
+                  <a:srgbClr val="3D3D3D"/>
+                </a:solidFill>
+                <a:latin typeface="Pretendard"/>
+                <a:ea typeface="Pretendard"/>
+                <a:cs typeface="Pretendard"/>
+              </a:rPr>
               <a:t>6(음수)·빈 키 걸러짐 · 7 신규</a:t>
             </a:r>
           </a:p>
@@ -14719,13 +15281,13 @@
       </p:sp>
       <p:sp>
         <p:nvSpPr>
-          <p:cNvPr id="48" name="TextBox 47"/>
-          <p:cNvSpPr txBox="1"/>
-          <p:nvPr/>
-        </p:nvSpPr>
-        <p:spPr>
-          <a:xfrm>
-            <a:off x="1143000" y="5638800"/>
+          <p:cNvPr id="58" name="TextBox 57"/>
+          <p:cNvSpPr txBox="1"/>
+          <p:nvPr/>
+        </p:nvSpPr>
+        <p:spPr>
+          <a:xfrm>
+            <a:off x="1143000" y="6362700"/>
             <a:ext cx="16002000" cy="438150"/>
           </a:xfrm>
           <a:prstGeom prst="rect">
@@ -14760,7 +15322,7 @@
       </p:sp>
       <p:sp>
         <p:nvSpPr>
-          <p:cNvPr id="49" name="TextBox 48"/>
+          <p:cNvPr id="59" name="TextBox 58"/>
           <p:cNvSpPr txBox="1"/>
           <p:nvPr/>
         </p:nvSpPr>
@@ -14794,14 +15356,14 @@
                 <a:ea typeface="Pretendard"/>
                 <a:cs typeface="Pretendard"/>
               </a:rPr>
-              <a:t>스크립트는 한 글자도 안 고쳤다 · 정리: mc rm local/raw/orders/orders_bad.csv 로 불량 파일은 랜딩 존에서 뺀다</a:t>
-            </a:r>
-          </a:p>
-        </p:txBody>
-      </p:sp>
-      <p:sp>
-        <p:nvSpPr>
-          <p:cNvPr id="50" name="Rectangle 49"/>
+              <a:t>스크립트는 한 글자도 안 고쳤다 · 정리: mc rm 으로 orders_bad.csv 를 빼면 랜딩 존 파일 셋</a:t>
+            </a:r>
+          </a:p>
+        </p:txBody>
+      </p:sp>
+      <p:sp>
+        <p:nvSpPr>
+          <p:cNvPr id="60" name="Rectangle 59"/>
           <p:cNvSpPr/>
           <p:nvPr/>
         </p:nvSpPr>
@@ -14831,7 +15393,7 @@
       </p:sp>
       <p:sp>
         <p:nvSpPr>
-          <p:cNvPr id="51" name="TextBox 50"/>
+          <p:cNvPr id="61" name="TextBox 60"/>
           <p:cNvSpPr txBox="1"/>
           <p:nvPr/>
         </p:nvSpPr>
@@ -14872,7 +15434,7 @@
       </p:sp>
       <p:sp>
         <p:nvSpPr>
-          <p:cNvPr id="52" name="TextBox 51"/>
+          <p:cNvPr id="62" name="TextBox 61"/>
           <p:cNvSpPr txBox="1"/>
           <p:nvPr/>
         </p:nvSpPr>
